--- a/neerlandais1/powerpoints/Module_18_De_toekomst.pptx
+++ b/neerlandais1/powerpoints/Module_18_De_toekomst.pptx
@@ -133,18 +133,18 @@
   <p:extLst>
     <p:ext uri="{521415D9-36F7-43E2-AB2F-B90AF26B5E84}">
       <p14:sectionLst xmlns:p14="http://schemas.microsoft.com/office/powerpoint/2010/main">
-        <p14:section name="Ouverture" id="{3a276b07-0ae5-3e3c-dccc-dda6448731ed}">
+        <p14:section name="Ouverture" id="{3cd3ab7b-119d-917b-356a-a6bbb74b8718}">
           <p14:sldIdLst>
             <p14:sldId id="256"/>
           </p14:sldIdLst>
         </p14:section>
-        <p14:section name="Découvrir" id="{abf79263-0dd0-9c52-1953-cf6ceee41bb9}">
+        <p14:section name="Découvrir" id="{93c39155-7c5b-11b2-3091-f3258c65c0a5}">
           <p14:sldIdLst>
             <p14:sldId id="257"/>
             <p14:sldId id="258"/>
           </p14:sldIdLst>
         </p14:section>
-        <p14:section name="Comprendre" id="{0189ac28-20a8-fb66-f660-6d714d9aea94}">
+        <p14:section name="Comprendre" id="{6f216f9c-809f-3580-7e8e-2533a1c0c8c9}">
           <p14:sldIdLst>
             <p14:sldId id="259"/>
             <p14:sldId id="260"/>
@@ -158,7 +158,7 @@
             <p14:sldId id="268"/>
           </p14:sldIdLst>
         </p14:section>
-        <p14:section name="JIJ NU ! — Oefeningen" id="{cc8c59eb-5187-d3b3-10d1-8ae7221d30e1}">
+        <p14:section name="JIJ NU ! — Oefeningen" id="{602bf555-5484-cbcb-18bf-2e13bb122c69}">
           <p14:sldIdLst>
             <p14:sldId id="269"/>
             <p14:sldId id="270"/>
@@ -175,7 +175,7 @@
             <p14:sldId id="281"/>
           </p14:sldIdLst>
         </p14:section>
-        <p14:section name="Clôture" id="{939c732c-0171-1794-9996-13567bf19501}">
+        <p14:section name="Clôture" id="{77faba4f-a56d-6cb6-ee3e-7589dd1d7524}">
           <p14:sldIdLst>
             <p14:sldId id="282"/>
           </p14:sldIdLst>
@@ -3806,7 +3806,7 @@
                   <a:srgbClr val="FFFFFF"/>
                 </a:solidFill>
               </a:rPr>
-              <a:t>MODULE 18 / 19</a:t>
+              <a:t>MODULE 18 / 24</a:t>
             </a:r>
             <a:endParaRPr lang="en-US" sz="1400" dirty="0"/>
           </a:p>

--- a/neerlandais1/powerpoints/Module_18_De_toekomst.pptx
+++ b/neerlandais1/powerpoints/Module_18_De_toekomst.pptx
@@ -133,18 +133,18 @@
   <p:extLst>
     <p:ext uri="{521415D9-36F7-43E2-AB2F-B90AF26B5E84}">
       <p14:sectionLst xmlns:p14="http://schemas.microsoft.com/office/powerpoint/2010/main">
-        <p14:section name="Ouverture" id="{3cd3ab7b-119d-917b-356a-a6bbb74b8718}">
+        <p14:section name="Ouverture" id="{ed016bfa-4119-393c-3f54-285d7be89eb7}">
           <p14:sldIdLst>
             <p14:sldId id="256"/>
           </p14:sldIdLst>
         </p14:section>
-        <p14:section name="Découvrir" id="{93c39155-7c5b-11b2-3091-f3258c65c0a5}">
+        <p14:section name="Découvrir" id="{613b3926-a346-8ed3-338f-4d7cae284ef8}">
           <p14:sldIdLst>
             <p14:sldId id="257"/>
             <p14:sldId id="258"/>
           </p14:sldIdLst>
         </p14:section>
-        <p14:section name="Comprendre" id="{6f216f9c-809f-3580-7e8e-2533a1c0c8c9}">
+        <p14:section name="Comprendre" id="{129d72cb-40cc-f698-8d56-ae328dc681d2}">
           <p14:sldIdLst>
             <p14:sldId id="259"/>
             <p14:sldId id="260"/>
@@ -158,7 +158,7 @@
             <p14:sldId id="268"/>
           </p14:sldIdLst>
         </p14:section>
-        <p14:section name="JIJ NU ! — Oefeningen" id="{602bf555-5484-cbcb-18bf-2e13bb122c69}">
+        <p14:section name="JIJ NU ! — Oefeningen" id="{b079582c-ebe9-3c92-2bb7-6919e19b21b1}">
           <p14:sldIdLst>
             <p14:sldId id="269"/>
             <p14:sldId id="270"/>
@@ -175,7 +175,7 @@
             <p14:sldId id="281"/>
           </p14:sldIdLst>
         </p14:section>
-        <p14:section name="Clôture" id="{77faba4f-a56d-6cb6-ee3e-7589dd1d7524}">
+        <p14:section name="Clôture" id="{ae8aba95-5785-8f8e-105a-8aeb2a182ceb}">
           <p14:sldIdLst>
             <p14:sldId id="282"/>
           </p14:sldIdLst>
@@ -3806,7 +3806,7 @@
                   <a:srgbClr val="FFFFFF"/>
                 </a:solidFill>
               </a:rPr>
-              <a:t>MODULE 18 / 24</a:t>
+              <a:t>MODULE 18 / 29</a:t>
             </a:r>
             <a:endParaRPr lang="en-US" sz="1400" dirty="0"/>
           </a:p>

--- a/neerlandais1/powerpoints/Module_18_De_toekomst.pptx
+++ b/neerlandais1/powerpoints/Module_18_De_toekomst.pptx
@@ -133,18 +133,18 @@
   <p:extLst>
     <p:ext uri="{521415D9-36F7-43E2-AB2F-B90AF26B5E84}">
       <p14:sectionLst xmlns:p14="http://schemas.microsoft.com/office/powerpoint/2010/main">
-        <p14:section name="Ouverture" id="{ed016bfa-4119-393c-3f54-285d7be89eb7}">
+        <p14:section name="Ouverture" id="{2c67f047-d9d4-4363-098e-d4bf1202161c}">
           <p14:sldIdLst>
             <p14:sldId id="256"/>
           </p14:sldIdLst>
         </p14:section>
-        <p14:section name="Découvrir" id="{613b3926-a346-8ed3-338f-4d7cae284ef8}">
+        <p14:section name="Découvrir" id="{ac2c1fa8-f541-886b-7870-96b974d7ad2e}">
           <p14:sldIdLst>
             <p14:sldId id="257"/>
             <p14:sldId id="258"/>
           </p14:sldIdLst>
         </p14:section>
-        <p14:section name="Comprendre" id="{129d72cb-40cc-f698-8d56-ae328dc681d2}">
+        <p14:section name="Comprendre" id="{d0f4fd34-4a30-7246-0630-9e2cb599540b}">
           <p14:sldIdLst>
             <p14:sldId id="259"/>
             <p14:sldId id="260"/>
@@ -158,7 +158,7 @@
             <p14:sldId id="268"/>
           </p14:sldIdLst>
         </p14:section>
-        <p14:section name="JIJ NU ! — Oefeningen" id="{b079582c-ebe9-3c92-2bb7-6919e19b21b1}">
+        <p14:section name="JIJ NU ! — Oefeningen" id="{44568e50-70f4-2633-a9ca-feda4a3abdbc}">
           <p14:sldIdLst>
             <p14:sldId id="269"/>
             <p14:sldId id="270"/>
@@ -175,7 +175,7 @@
             <p14:sldId id="281"/>
           </p14:sldIdLst>
         </p14:section>
-        <p14:section name="Clôture" id="{ae8aba95-5785-8f8e-105a-8aeb2a182ceb}">
+        <p14:section name="Clôture" id="{3438d749-8359-b95f-b213-c39ee886b213}">
           <p14:sldIdLst>
             <p14:sldId id="282"/>
           </p14:sldIdLst>
@@ -3806,7 +3806,7 @@
                   <a:srgbClr val="FFFFFF"/>
                 </a:solidFill>
               </a:rPr>
-              <a:t>MODULE 18 / 29</a:t>
+              <a:t>MODULE 18 / 32</a:t>
             </a:r>
             <a:endParaRPr lang="en-US" sz="1400" dirty="0"/>
           </a:p>

--- a/neerlandais1/powerpoints/Module_18_De_toekomst.pptx
+++ b/neerlandais1/powerpoints/Module_18_De_toekomst.pptx
@@ -133,18 +133,18 @@
   <p:extLst>
     <p:ext uri="{521415D9-36F7-43E2-AB2F-B90AF26B5E84}">
       <p14:sectionLst xmlns:p14="http://schemas.microsoft.com/office/powerpoint/2010/main">
-        <p14:section name="Ouverture" id="{2c67f047-d9d4-4363-098e-d4bf1202161c}">
+        <p14:section name="Ouverture" id="{d81e3387-188c-fab1-fade-4ce9b2787de6}">
           <p14:sldIdLst>
             <p14:sldId id="256"/>
           </p14:sldIdLst>
         </p14:section>
-        <p14:section name="Découvrir" id="{ac2c1fa8-f541-886b-7870-96b974d7ad2e}">
+        <p14:section name="Découvrir" id="{7778735e-a8eb-29b0-b58a-8fefc7abca56}">
           <p14:sldIdLst>
             <p14:sldId id="257"/>
             <p14:sldId id="258"/>
           </p14:sldIdLst>
         </p14:section>
-        <p14:section name="Comprendre" id="{d0f4fd34-4a30-7246-0630-9e2cb599540b}">
+        <p14:section name="Comprendre" id="{ac7c539c-3321-0c1f-a75a-aae81dab8dcf}">
           <p14:sldIdLst>
             <p14:sldId id="259"/>
             <p14:sldId id="260"/>
@@ -158,7 +158,7 @@
             <p14:sldId id="268"/>
           </p14:sldIdLst>
         </p14:section>
-        <p14:section name="JIJ NU ! — Oefeningen" id="{44568e50-70f4-2633-a9ca-feda4a3abdbc}">
+        <p14:section name="JIJ NU ! — Oefeningen" id="{a1ef8e25-9278-1b27-8008-b42376a25c0f}">
           <p14:sldIdLst>
             <p14:sldId id="269"/>
             <p14:sldId id="270"/>
@@ -175,7 +175,7 @@
             <p14:sldId id="281"/>
           </p14:sldIdLst>
         </p14:section>
-        <p14:section name="Clôture" id="{3438d749-8359-b95f-b213-c39ee886b213}">
+        <p14:section name="Clôture" id="{24d9c67f-07bc-7c1d-392f-869d05cf29bf}">
           <p14:sldIdLst>
             <p14:sldId id="282"/>
           </p14:sldIdLst>

--- a/neerlandais1/powerpoints/Module_18_De_toekomst.pptx
+++ b/neerlandais1/powerpoints/Module_18_De_toekomst.pptx
@@ -133,18 +133,18 @@
   <p:extLst>
     <p:ext uri="{521415D9-36F7-43E2-AB2F-B90AF26B5E84}">
       <p14:sectionLst xmlns:p14="http://schemas.microsoft.com/office/powerpoint/2010/main">
-        <p14:section name="Ouverture" id="{d81e3387-188c-fab1-fade-4ce9b2787de6}">
+        <p14:section name="Ouverture" id="{d9e9a9e8-ec02-e97d-2b82-afa4cb6b0bf1}">
           <p14:sldIdLst>
             <p14:sldId id="256"/>
           </p14:sldIdLst>
         </p14:section>
-        <p14:section name="Découvrir" id="{7778735e-a8eb-29b0-b58a-8fefc7abca56}">
+        <p14:section name="Découvrir" id="{83535dad-224e-a8c1-98d5-428d31b267f6}">
           <p14:sldIdLst>
             <p14:sldId id="257"/>
             <p14:sldId id="258"/>
           </p14:sldIdLst>
         </p14:section>
-        <p14:section name="Comprendre" id="{ac7c539c-3321-0c1f-a75a-aae81dab8dcf}">
+        <p14:section name="Comprendre" id="{7f7ea97b-6f7c-6d40-0884-030d547884a7}">
           <p14:sldIdLst>
             <p14:sldId id="259"/>
             <p14:sldId id="260"/>
@@ -158,7 +158,7 @@
             <p14:sldId id="268"/>
           </p14:sldIdLst>
         </p14:section>
-        <p14:section name="JIJ NU ! — Oefeningen" id="{a1ef8e25-9278-1b27-8008-b42376a25c0f}">
+        <p14:section name="JIJ NU ! — Oefeningen" id="{96ba6260-75b7-1885-c602-c68328c57819}">
           <p14:sldIdLst>
             <p14:sldId id="269"/>
             <p14:sldId id="270"/>
@@ -175,7 +175,7 @@
             <p14:sldId id="281"/>
           </p14:sldIdLst>
         </p14:section>
-        <p14:section name="Clôture" id="{24d9c67f-07bc-7c1d-392f-869d05cf29bf}">
+        <p14:section name="Clôture" id="{b5b0f0aa-b2d7-ab71-c531-265e2c87dea6}">
           <p14:sldIdLst>
             <p14:sldId id="282"/>
           </p14:sldIdLst>

--- a/neerlandais1/powerpoints/Module_18_De_toekomst.pptx
+++ b/neerlandais1/powerpoints/Module_18_De_toekomst.pptx
@@ -133,18 +133,18 @@
   <p:extLst>
     <p:ext uri="{521415D9-36F7-43E2-AB2F-B90AF26B5E84}">
       <p14:sectionLst xmlns:p14="http://schemas.microsoft.com/office/powerpoint/2010/main">
-        <p14:section name="Ouverture" id="{d9e9a9e8-ec02-e97d-2b82-afa4cb6b0bf1}">
+        <p14:section name="Ouverture" id="{cd6d808c-bcd9-0364-38b1-c35e7bb60479}">
           <p14:sldIdLst>
             <p14:sldId id="256"/>
           </p14:sldIdLst>
         </p14:section>
-        <p14:section name="Découvrir" id="{83535dad-224e-a8c1-98d5-428d31b267f6}">
+        <p14:section name="Découvrir" id="{16084279-3394-561c-c4f4-209e371c9d8f}">
           <p14:sldIdLst>
             <p14:sldId id="257"/>
             <p14:sldId id="258"/>
           </p14:sldIdLst>
         </p14:section>
-        <p14:section name="Comprendre" id="{7f7ea97b-6f7c-6d40-0884-030d547884a7}">
+        <p14:section name="Comprendre" id="{017cd6ab-341f-ef90-0459-71f3d8b802f7}">
           <p14:sldIdLst>
             <p14:sldId id="259"/>
             <p14:sldId id="260"/>
@@ -158,7 +158,7 @@
             <p14:sldId id="268"/>
           </p14:sldIdLst>
         </p14:section>
-        <p14:section name="JIJ NU ! — Oefeningen" id="{96ba6260-75b7-1885-c602-c68328c57819}">
+        <p14:section name="JIJ NU ! — Oefeningen" id="{10704b14-62c2-c1f2-f012-692f78cfe7c3}">
           <p14:sldIdLst>
             <p14:sldId id="269"/>
             <p14:sldId id="270"/>
@@ -175,7 +175,7 @@
             <p14:sldId id="281"/>
           </p14:sldIdLst>
         </p14:section>
-        <p14:section name="Clôture" id="{b5b0f0aa-b2d7-ab71-c531-265e2c87dea6}">
+        <p14:section name="Clôture" id="{8ef91b94-59e9-89c2-130d-cd679d7eca2a}">
           <p14:sldIdLst>
             <p14:sldId id="282"/>
           </p14:sldIdLst>

--- a/neerlandais1/powerpoints/Module_18_De_toekomst.pptx
+++ b/neerlandais1/powerpoints/Module_18_De_toekomst.pptx
@@ -133,18 +133,18 @@
   <p:extLst>
     <p:ext uri="{521415D9-36F7-43E2-AB2F-B90AF26B5E84}">
       <p14:sectionLst xmlns:p14="http://schemas.microsoft.com/office/powerpoint/2010/main">
-        <p14:section name="Ouverture" id="{cd6d808c-bcd9-0364-38b1-c35e7bb60479}">
+        <p14:section name="Ouverture" id="{d2f3540e-63bc-94dd-02fe-bac81fad1cb6}">
           <p14:sldIdLst>
             <p14:sldId id="256"/>
           </p14:sldIdLst>
         </p14:section>
-        <p14:section name="Découvrir" id="{16084279-3394-561c-c4f4-209e371c9d8f}">
+        <p14:section name="Découvrir" id="{b5bbc05c-755f-3be2-2eb0-0cbf6c667f74}">
           <p14:sldIdLst>
             <p14:sldId id="257"/>
             <p14:sldId id="258"/>
           </p14:sldIdLst>
         </p14:section>
-        <p14:section name="Comprendre" id="{017cd6ab-341f-ef90-0459-71f3d8b802f7}">
+        <p14:section name="Comprendre" id="{5b65c73a-885c-f457-ae55-6b141d9c061e}">
           <p14:sldIdLst>
             <p14:sldId id="259"/>
             <p14:sldId id="260"/>
@@ -158,7 +158,7 @@
             <p14:sldId id="268"/>
           </p14:sldIdLst>
         </p14:section>
-        <p14:section name="JIJ NU ! — Oefeningen" id="{10704b14-62c2-c1f2-f012-692f78cfe7c3}">
+        <p14:section name="JIJ NU ! — Oefeningen" id="{133afe0a-b3f6-2d3e-51e0-813cfc4145a5}">
           <p14:sldIdLst>
             <p14:sldId id="269"/>
             <p14:sldId id="270"/>
@@ -175,7 +175,7 @@
             <p14:sldId id="281"/>
           </p14:sldIdLst>
         </p14:section>
-        <p14:section name="Clôture" id="{8ef91b94-59e9-89c2-130d-cd679d7eca2a}">
+        <p14:section name="Clôture" id="{9e7ceeb3-330c-a321-018c-bbeb3f4666f6}">
           <p14:sldIdLst>
             <p14:sldId id="282"/>
           </p14:sldIdLst>

--- a/neerlandais1/powerpoints/Module_18_De_toekomst.pptx
+++ b/neerlandais1/powerpoints/Module_18_De_toekomst.pptx
@@ -133,18 +133,18 @@
   <p:extLst>
     <p:ext uri="{521415D9-36F7-43E2-AB2F-B90AF26B5E84}">
       <p14:sectionLst xmlns:p14="http://schemas.microsoft.com/office/powerpoint/2010/main">
-        <p14:section name="Ouverture" id="{d2f3540e-63bc-94dd-02fe-bac81fad1cb6}">
+        <p14:section name="Ouverture" id="{effe9764-caf1-41cc-c967-b7a4a160890c}">
           <p14:sldIdLst>
             <p14:sldId id="256"/>
           </p14:sldIdLst>
         </p14:section>
-        <p14:section name="Découvrir" id="{b5bbc05c-755f-3be2-2eb0-0cbf6c667f74}">
+        <p14:section name="Découvrir" id="{c8bc0172-40c4-0525-c065-04ffb70603ab}">
           <p14:sldIdLst>
             <p14:sldId id="257"/>
             <p14:sldId id="258"/>
           </p14:sldIdLst>
         </p14:section>
-        <p14:section name="Comprendre" id="{5b65c73a-885c-f457-ae55-6b141d9c061e}">
+        <p14:section name="Comprendre" id="{8f74789a-aaf7-3b4b-4c2f-f5ff34d3e8b2}">
           <p14:sldIdLst>
             <p14:sldId id="259"/>
             <p14:sldId id="260"/>
@@ -158,7 +158,7 @@
             <p14:sldId id="268"/>
           </p14:sldIdLst>
         </p14:section>
-        <p14:section name="JIJ NU ! — Oefeningen" id="{133afe0a-b3f6-2d3e-51e0-813cfc4145a5}">
+        <p14:section name="JIJ NU ! — Oefeningen" id="{4785a105-9ac4-e3ce-9fb1-e4bcbf54d777}">
           <p14:sldIdLst>
             <p14:sldId id="269"/>
             <p14:sldId id="270"/>
@@ -175,7 +175,7 @@
             <p14:sldId id="281"/>
           </p14:sldIdLst>
         </p14:section>
-        <p14:section name="Clôture" id="{9e7ceeb3-330c-a321-018c-bbeb3f4666f6}">
+        <p14:section name="Clôture" id="{ae19442f-c95a-545b-5d72-03a1e3e4ddc5}">
           <p14:sldIdLst>
             <p14:sldId id="282"/>
           </p14:sldIdLst>

--- a/neerlandais1/powerpoints/Module_18_De_toekomst.pptx
+++ b/neerlandais1/powerpoints/Module_18_De_toekomst.pptx
@@ -133,18 +133,18 @@
   <p:extLst>
     <p:ext uri="{521415D9-36F7-43E2-AB2F-B90AF26B5E84}">
       <p14:sectionLst xmlns:p14="http://schemas.microsoft.com/office/powerpoint/2010/main">
-        <p14:section name="Ouverture" id="{effe9764-caf1-41cc-c967-b7a4a160890c}">
+        <p14:section name="Ouverture" id="{d2b98d83-d922-1204-4747-6ba5d2dfde43}">
           <p14:sldIdLst>
             <p14:sldId id="256"/>
           </p14:sldIdLst>
         </p14:section>
-        <p14:section name="Découvrir" id="{c8bc0172-40c4-0525-c065-04ffb70603ab}">
+        <p14:section name="Découvrir" id="{7fd901fd-4150-b261-ce0a-161138318508}">
           <p14:sldIdLst>
             <p14:sldId id="257"/>
             <p14:sldId id="258"/>
           </p14:sldIdLst>
         </p14:section>
-        <p14:section name="Comprendre" id="{8f74789a-aaf7-3b4b-4c2f-f5ff34d3e8b2}">
+        <p14:section name="Comprendre" id="{b7c16422-4f3e-dcb8-f065-8697b2381b46}">
           <p14:sldIdLst>
             <p14:sldId id="259"/>
             <p14:sldId id="260"/>
@@ -158,7 +158,7 @@
             <p14:sldId id="268"/>
           </p14:sldIdLst>
         </p14:section>
-        <p14:section name="JIJ NU ! — Oefeningen" id="{4785a105-9ac4-e3ce-9fb1-e4bcbf54d777}">
+        <p14:section name="JIJ NU ! — Oefeningen" id="{fb590ebf-2b63-f430-a9d7-8702dcd987c9}">
           <p14:sldIdLst>
             <p14:sldId id="269"/>
             <p14:sldId id="270"/>
@@ -175,7 +175,7 @@
             <p14:sldId id="281"/>
           </p14:sldIdLst>
         </p14:section>
-        <p14:section name="Clôture" id="{ae19442f-c95a-545b-5d72-03a1e3e4ddc5}">
+        <p14:section name="Clôture" id="{28674cec-9712-f7b8-8600-c00eee397436}">
           <p14:sldIdLst>
             <p14:sldId id="282"/>
           </p14:sldIdLst>

--- a/neerlandais1/powerpoints/Module_18_De_toekomst.pptx
+++ b/neerlandais1/powerpoints/Module_18_De_toekomst.pptx
@@ -133,18 +133,18 @@
   <p:extLst>
     <p:ext uri="{521415D9-36F7-43E2-AB2F-B90AF26B5E84}">
       <p14:sectionLst xmlns:p14="http://schemas.microsoft.com/office/powerpoint/2010/main">
-        <p14:section name="Ouverture" id="{d2b98d83-d922-1204-4747-6ba5d2dfde43}">
+        <p14:section name="Ouverture" id="{45a6afa0-63aa-61de-18fe-b3ee6d72d410}">
           <p14:sldIdLst>
             <p14:sldId id="256"/>
           </p14:sldIdLst>
         </p14:section>
-        <p14:section name="Découvrir" id="{7fd901fd-4150-b261-ce0a-161138318508}">
+        <p14:section name="Découvrir" id="{0d337aa3-f907-08cb-ae1f-1bdacde6c6d4}">
           <p14:sldIdLst>
             <p14:sldId id="257"/>
             <p14:sldId id="258"/>
           </p14:sldIdLst>
         </p14:section>
-        <p14:section name="Comprendre" id="{b7c16422-4f3e-dcb8-f065-8697b2381b46}">
+        <p14:section name="Comprendre" id="{6ef7e298-95d0-7e52-dee6-9392e9a1320d}">
           <p14:sldIdLst>
             <p14:sldId id="259"/>
             <p14:sldId id="260"/>
@@ -158,7 +158,7 @@
             <p14:sldId id="268"/>
           </p14:sldIdLst>
         </p14:section>
-        <p14:section name="JIJ NU ! — Oefeningen" id="{fb590ebf-2b63-f430-a9d7-8702dcd987c9}">
+        <p14:section name="JIJ NU ! — Oefeningen" id="{93c2e873-5acd-1b66-ad1c-ca2a97daa400}">
           <p14:sldIdLst>
             <p14:sldId id="269"/>
             <p14:sldId id="270"/>
@@ -175,7 +175,7 @@
             <p14:sldId id="281"/>
           </p14:sldIdLst>
         </p14:section>
-        <p14:section name="Clôture" id="{28674cec-9712-f7b8-8600-c00eee397436}">
+        <p14:section name="Clôture" id="{0da83fb4-ac2b-ab66-27ef-25e4ec77df8d}">
           <p14:sldIdLst>
             <p14:sldId id="282"/>
           </p14:sldIdLst>

--- a/neerlandais1/powerpoints/Module_18_De_toekomst.pptx
+++ b/neerlandais1/powerpoints/Module_18_De_toekomst.pptx
@@ -133,18 +133,18 @@
   <p:extLst>
     <p:ext uri="{521415D9-36F7-43E2-AB2F-B90AF26B5E84}">
       <p14:sectionLst xmlns:p14="http://schemas.microsoft.com/office/powerpoint/2010/main">
-        <p14:section name="Ouverture" id="{45a6afa0-63aa-61de-18fe-b3ee6d72d410}">
+        <p14:section name="Ouverture" id="{3dea9412-30ab-fcfa-f265-a787c34cb1b7}">
           <p14:sldIdLst>
             <p14:sldId id="256"/>
           </p14:sldIdLst>
         </p14:section>
-        <p14:section name="Découvrir" id="{0d337aa3-f907-08cb-ae1f-1bdacde6c6d4}">
+        <p14:section name="Découvrir" id="{78c22cc6-e8aa-eec0-a9e0-aecd68741797}">
           <p14:sldIdLst>
             <p14:sldId id="257"/>
             <p14:sldId id="258"/>
           </p14:sldIdLst>
         </p14:section>
-        <p14:section name="Comprendre" id="{6ef7e298-95d0-7e52-dee6-9392e9a1320d}">
+        <p14:section name="Comprendre" id="{2442f406-d406-6094-5992-bc8f10eceb14}">
           <p14:sldIdLst>
             <p14:sldId id="259"/>
             <p14:sldId id="260"/>
@@ -158,7 +158,7 @@
             <p14:sldId id="268"/>
           </p14:sldIdLst>
         </p14:section>
-        <p14:section name="JIJ NU ! — Oefeningen" id="{93c2e873-5acd-1b66-ad1c-ca2a97daa400}">
+        <p14:section name="JIJ NU ! — Oefeningen" id="{1671a0bf-cef8-939f-7d25-dc9a3c865049}">
           <p14:sldIdLst>
             <p14:sldId id="269"/>
             <p14:sldId id="270"/>
@@ -175,7 +175,7 @@
             <p14:sldId id="281"/>
           </p14:sldIdLst>
         </p14:section>
-        <p14:section name="Clôture" id="{0da83fb4-ac2b-ab66-27ef-25e4ec77df8d}">
+        <p14:section name="Clôture" id="{e2776020-efe1-e737-df83-701dc1208080}">
           <p14:sldIdLst>
             <p14:sldId id="282"/>
           </p14:sldIdLst>
